--- a/Наработки/диздоки/Марокко/Fr_Marokko.pptx
+++ b/Наработки/диздоки/Марокко/Fr_Marokko.pptx
@@ -197,7 +197,7 @@
           <a:p>
             <a:fld id="{0F146180-77CB-4488-88A5-25230BD44EE1}" type="datetimeFigureOut">
               <a:rPr lang="ru-RU" smtClean="0"/>
-              <a:t>29.07.2023</a:t>
+              <a:t>09.06.2026</a:t>
             </a:fld>
             <a:endParaRPr lang="ru-RU"/>
           </a:p>
@@ -679,7 +679,7 @@
           <a:p>
             <a:fld id="{87D4E52F-54CF-4CC8-A69B-17A3531F5626}" type="datetimeFigureOut">
               <a:rPr lang="ru-RU" smtClean="0"/>
-              <a:t>29.07.2023</a:t>
+              <a:t>09.06.2026</a:t>
             </a:fld>
             <a:endParaRPr lang="ru-RU"/>
           </a:p>
@@ -849,7 +849,7 @@
           <a:p>
             <a:fld id="{87D4E52F-54CF-4CC8-A69B-17A3531F5626}" type="datetimeFigureOut">
               <a:rPr lang="ru-RU" smtClean="0"/>
-              <a:t>29.07.2023</a:t>
+              <a:t>09.06.2026</a:t>
             </a:fld>
             <a:endParaRPr lang="ru-RU"/>
           </a:p>
@@ -1029,7 +1029,7 @@
           <a:p>
             <a:fld id="{87D4E52F-54CF-4CC8-A69B-17A3531F5626}" type="datetimeFigureOut">
               <a:rPr lang="ru-RU" smtClean="0"/>
-              <a:t>29.07.2023</a:t>
+              <a:t>09.06.2026</a:t>
             </a:fld>
             <a:endParaRPr lang="ru-RU"/>
           </a:p>
@@ -1199,7 +1199,7 @@
           <a:p>
             <a:fld id="{87D4E52F-54CF-4CC8-A69B-17A3531F5626}" type="datetimeFigureOut">
               <a:rPr lang="ru-RU" smtClean="0"/>
-              <a:t>29.07.2023</a:t>
+              <a:t>09.06.2026</a:t>
             </a:fld>
             <a:endParaRPr lang="ru-RU"/>
           </a:p>
@@ -1443,7 +1443,7 @@
           <a:p>
             <a:fld id="{87D4E52F-54CF-4CC8-A69B-17A3531F5626}" type="datetimeFigureOut">
               <a:rPr lang="ru-RU" smtClean="0"/>
-              <a:t>29.07.2023</a:t>
+              <a:t>09.06.2026</a:t>
             </a:fld>
             <a:endParaRPr lang="ru-RU"/>
           </a:p>
@@ -1675,7 +1675,7 @@
           <a:p>
             <a:fld id="{87D4E52F-54CF-4CC8-A69B-17A3531F5626}" type="datetimeFigureOut">
               <a:rPr lang="ru-RU" smtClean="0"/>
-              <a:t>29.07.2023</a:t>
+              <a:t>09.06.2026</a:t>
             </a:fld>
             <a:endParaRPr lang="ru-RU"/>
           </a:p>
@@ -2042,7 +2042,7 @@
           <a:p>
             <a:fld id="{87D4E52F-54CF-4CC8-A69B-17A3531F5626}" type="datetimeFigureOut">
               <a:rPr lang="ru-RU" smtClean="0"/>
-              <a:t>29.07.2023</a:t>
+              <a:t>09.06.2026</a:t>
             </a:fld>
             <a:endParaRPr lang="ru-RU"/>
           </a:p>
@@ -2160,7 +2160,7 @@
           <a:p>
             <a:fld id="{87D4E52F-54CF-4CC8-A69B-17A3531F5626}" type="datetimeFigureOut">
               <a:rPr lang="ru-RU" smtClean="0"/>
-              <a:t>29.07.2023</a:t>
+              <a:t>09.06.2026</a:t>
             </a:fld>
             <a:endParaRPr lang="ru-RU"/>
           </a:p>
@@ -2255,7 +2255,7 @@
           <a:p>
             <a:fld id="{87D4E52F-54CF-4CC8-A69B-17A3531F5626}" type="datetimeFigureOut">
               <a:rPr lang="ru-RU" smtClean="0"/>
-              <a:t>29.07.2023</a:t>
+              <a:t>09.06.2026</a:t>
             </a:fld>
             <a:endParaRPr lang="ru-RU"/>
           </a:p>
@@ -2532,7 +2532,7 @@
           <a:p>
             <a:fld id="{87D4E52F-54CF-4CC8-A69B-17A3531F5626}" type="datetimeFigureOut">
               <a:rPr lang="ru-RU" smtClean="0"/>
-              <a:t>29.07.2023</a:t>
+              <a:t>09.06.2026</a:t>
             </a:fld>
             <a:endParaRPr lang="ru-RU"/>
           </a:p>
@@ -2789,7 +2789,7 @@
           <a:p>
             <a:fld id="{87D4E52F-54CF-4CC8-A69B-17A3531F5626}" type="datetimeFigureOut">
               <a:rPr lang="ru-RU" smtClean="0"/>
-              <a:t>29.07.2023</a:t>
+              <a:t>09.06.2026</a:t>
             </a:fld>
             <a:endParaRPr lang="ru-RU"/>
           </a:p>
@@ -3002,7 +3002,7 @@
           <a:p>
             <a:fld id="{87D4E52F-54CF-4CC8-A69B-17A3531F5626}" type="datetimeFigureOut">
               <a:rPr lang="ru-RU" smtClean="0"/>
-              <a:t>29.07.2023</a:t>
+              <a:t>09.06.2026</a:t>
             </a:fld>
             <a:endParaRPr lang="ru-RU"/>
           </a:p>
@@ -8531,440 +8531,6 @@
             <a:r>
               <a:rPr lang="ru-RU" sz="400" dirty="0"/>
               <a:t>Переговоры с Францией о независимости</a:t>
-            </a:r>
-            <a:endParaRPr lang="de-CH" sz="400" dirty="0"/>
-          </a:p>
-        </p:txBody>
-      </p:sp>
-      <p:cxnSp>
-        <p:nvCxnSpPr>
-          <p:cNvPr id="245" name="Соединительная линия уступом 60">
-            <a:extLst>
-              <a:ext uri="{FF2B5EF4-FFF2-40B4-BE49-F238E27FC236}">
-                <a16:creationId xmlns:a16="http://schemas.microsoft.com/office/drawing/2014/main" id="{70EEDFDA-AC08-D09E-FB07-0B00231A8FF5}"/>
-              </a:ext>
-            </a:extLst>
-          </p:cNvPr>
-          <p:cNvCxnSpPr>
-            <a:cxnSpLocks/>
-            <a:stCxn id="6" idx="2"/>
-            <a:endCxn id="247" idx="0"/>
-          </p:cNvCxnSpPr>
-          <p:nvPr/>
-        </p:nvCxnSpPr>
-        <p:spPr>
-          <a:xfrm rot="5400000">
-            <a:off x="6766410" y="399819"/>
-            <a:ext cx="312586" cy="1834243"/>
-          </a:xfrm>
-          <a:prstGeom prst="bentConnector3">
-            <a:avLst>
-              <a:gd name="adj1" fmla="val 50000"/>
-            </a:avLst>
-          </a:prstGeom>
-          <a:ln>
-            <a:tailEnd type="triangle"/>
-          </a:ln>
-        </p:spPr>
-        <p:style>
-          <a:lnRef idx="1">
-            <a:schemeClr val="accent1"/>
-          </a:lnRef>
-          <a:fillRef idx="0">
-            <a:schemeClr val="accent1"/>
-          </a:fillRef>
-          <a:effectRef idx="0">
-            <a:schemeClr val="accent1"/>
-          </a:effectRef>
-          <a:fontRef idx="minor">
-            <a:schemeClr val="tx1"/>
-          </a:fontRef>
-        </p:style>
-      </p:cxnSp>
-      <p:sp>
-        <p:nvSpPr>
-          <p:cNvPr id="247" name="Заголовок 9">
-            <a:extLst>
-              <a:ext uri="{FF2B5EF4-FFF2-40B4-BE49-F238E27FC236}">
-                <a16:creationId xmlns:a16="http://schemas.microsoft.com/office/drawing/2014/main" id="{A991A5E3-B7EE-EC33-187C-CB59DE2DA9B4}"/>
-              </a:ext>
-            </a:extLst>
-          </p:cNvPr>
-          <p:cNvSpPr txBox="1">
-            <a:spLocks/>
-          </p:cNvSpPr>
-          <p:nvPr/>
-        </p:nvSpPr>
-        <p:spPr>
-          <a:xfrm>
-            <a:off x="5700088" y="1473233"/>
-            <a:ext cx="610985" cy="414806"/>
-          </a:xfrm>
-          <a:prstGeom prst="rect">
-            <a:avLst/>
-          </a:prstGeom>
-          <a:ln w="12700" cap="flat" cmpd="sng" algn="ctr">
-            <a:solidFill>
-              <a:schemeClr val="accent1">
-                <a:lumMod val="75000"/>
-              </a:schemeClr>
-            </a:solidFill>
-            <a:prstDash val="solid"/>
-            <a:miter lim="800000"/>
-          </a:ln>
-        </p:spPr>
-        <p:style>
-          <a:lnRef idx="2">
-            <a:schemeClr val="accent1">
-              <a:shade val="50000"/>
-            </a:schemeClr>
-          </a:lnRef>
-          <a:fillRef idx="1">
-            <a:schemeClr val="accent1"/>
-          </a:fillRef>
-          <a:effectRef idx="0">
-            <a:schemeClr val="accent1"/>
-          </a:effectRef>
-          <a:fontRef idx="minor">
-            <a:schemeClr val="lt1"/>
-          </a:fontRef>
-        </p:style>
-        <p:txBody>
-          <a:bodyPr vert="horz" lIns="91440" tIns="45720" rIns="91440" bIns="45720" rtlCol="0" anchor="ctr">
-            <a:normAutofit fontScale="92500" lnSpcReduction="20000"/>
-          </a:bodyPr>
-          <a:lstStyle>
-            <a:lvl1pPr algn="ctr" defTabSz="914400" rtl="0" eaLnBrk="1" latinLnBrk="0" hangingPunct="1">
-              <a:lnSpc>
-                <a:spcPct val="90000"/>
-              </a:lnSpc>
-              <a:spcBef>
-                <a:spcPct val="0"/>
-              </a:spcBef>
-              <a:buNone/>
-              <a:defRPr sz="6000" kern="1200">
-                <a:solidFill>
-                  <a:schemeClr val="lt1"/>
-                </a:solidFill>
-                <a:latin typeface="+mn-lt"/>
-                <a:ea typeface="+mn-ea"/>
-                <a:cs typeface="+mn-cs"/>
-              </a:defRPr>
-            </a:lvl1pPr>
-            <a:lvl2pPr>
-              <a:defRPr>
-                <a:solidFill>
-                  <a:schemeClr val="lt1"/>
-                </a:solidFill>
-                <a:latin typeface="+mn-lt"/>
-                <a:ea typeface="+mn-ea"/>
-                <a:cs typeface="+mn-cs"/>
-              </a:defRPr>
-            </a:lvl2pPr>
-            <a:lvl3pPr>
-              <a:defRPr>
-                <a:solidFill>
-                  <a:schemeClr val="lt1"/>
-                </a:solidFill>
-                <a:latin typeface="+mn-lt"/>
-                <a:ea typeface="+mn-ea"/>
-                <a:cs typeface="+mn-cs"/>
-              </a:defRPr>
-            </a:lvl3pPr>
-            <a:lvl4pPr>
-              <a:defRPr>
-                <a:solidFill>
-                  <a:schemeClr val="lt1"/>
-                </a:solidFill>
-                <a:latin typeface="+mn-lt"/>
-                <a:ea typeface="+mn-ea"/>
-                <a:cs typeface="+mn-cs"/>
-              </a:defRPr>
-            </a:lvl4pPr>
-            <a:lvl5pPr>
-              <a:defRPr>
-                <a:solidFill>
-                  <a:schemeClr val="lt1"/>
-                </a:solidFill>
-                <a:latin typeface="+mn-lt"/>
-                <a:ea typeface="+mn-ea"/>
-                <a:cs typeface="+mn-cs"/>
-              </a:defRPr>
-            </a:lvl5pPr>
-            <a:lvl6pPr>
-              <a:defRPr>
-                <a:solidFill>
-                  <a:schemeClr val="lt1"/>
-                </a:solidFill>
-                <a:latin typeface="+mn-lt"/>
-                <a:ea typeface="+mn-ea"/>
-                <a:cs typeface="+mn-cs"/>
-              </a:defRPr>
-            </a:lvl6pPr>
-            <a:lvl7pPr>
-              <a:defRPr>
-                <a:solidFill>
-                  <a:schemeClr val="lt1"/>
-                </a:solidFill>
-                <a:latin typeface="+mn-lt"/>
-                <a:ea typeface="+mn-ea"/>
-                <a:cs typeface="+mn-cs"/>
-              </a:defRPr>
-            </a:lvl7pPr>
-            <a:lvl8pPr>
-              <a:defRPr>
-                <a:solidFill>
-                  <a:schemeClr val="lt1"/>
-                </a:solidFill>
-                <a:latin typeface="+mn-lt"/>
-                <a:ea typeface="+mn-ea"/>
-                <a:cs typeface="+mn-cs"/>
-              </a:defRPr>
-            </a:lvl8pPr>
-            <a:lvl9pPr>
-              <a:defRPr>
-                <a:solidFill>
-                  <a:schemeClr val="lt1"/>
-                </a:solidFill>
-                <a:latin typeface="+mn-lt"/>
-                <a:ea typeface="+mn-ea"/>
-                <a:cs typeface="+mn-cs"/>
-              </a:defRPr>
-            </a:lvl9pPr>
-          </a:lstStyle>
-          <a:p>
-            <a:r>
-              <a:rPr lang="ru-RU" sz="400" dirty="0"/>
-              <a:t>Проблема с Испанским Марокко (Будут открыты решения по организации </a:t>
-            </a:r>
-            <a:r>
-              <a:rPr lang="ru-RU" sz="400" dirty="0" err="1"/>
-              <a:t>востания</a:t>
-            </a:r>
-            <a:r>
-              <a:rPr lang="ru-RU" sz="400" dirty="0"/>
-              <a:t> в </a:t>
-            </a:r>
-            <a:r>
-              <a:rPr lang="ru-RU" sz="400" dirty="0" err="1"/>
-              <a:t>Испанск</a:t>
-            </a:r>
-            <a:r>
-              <a:rPr lang="ru-RU" sz="400" dirty="0"/>
-              <a:t>. Марокко) </a:t>
-            </a:r>
-            <a:endParaRPr lang="de-CH" sz="400" dirty="0"/>
-          </a:p>
-        </p:txBody>
-      </p:sp>
-      <p:cxnSp>
-        <p:nvCxnSpPr>
-          <p:cNvPr id="253" name="Соединительная линия уступом 60">
-            <a:extLst>
-              <a:ext uri="{FF2B5EF4-FFF2-40B4-BE49-F238E27FC236}">
-                <a16:creationId xmlns:a16="http://schemas.microsoft.com/office/drawing/2014/main" id="{7C51970B-1960-22CF-0223-E114E38A0E6E}"/>
-              </a:ext>
-            </a:extLst>
-          </p:cNvPr>
-          <p:cNvCxnSpPr>
-            <a:cxnSpLocks/>
-            <a:stCxn id="247" idx="2"/>
-            <a:endCxn id="255" idx="0"/>
-          </p:cNvCxnSpPr>
-          <p:nvPr/>
-        </p:nvCxnSpPr>
-        <p:spPr>
-          <a:xfrm rot="5400000">
-            <a:off x="5925977" y="1949649"/>
-            <a:ext cx="141215" cy="17994"/>
-          </a:xfrm>
-          <a:prstGeom prst="bentConnector3">
-            <a:avLst>
-              <a:gd name="adj1" fmla="val 50000"/>
-            </a:avLst>
-          </a:prstGeom>
-          <a:ln>
-            <a:tailEnd type="triangle"/>
-          </a:ln>
-        </p:spPr>
-        <p:style>
-          <a:lnRef idx="1">
-            <a:schemeClr val="accent1"/>
-          </a:lnRef>
-          <a:fillRef idx="0">
-            <a:schemeClr val="accent1"/>
-          </a:fillRef>
-          <a:effectRef idx="0">
-            <a:schemeClr val="accent1"/>
-          </a:effectRef>
-          <a:fontRef idx="minor">
-            <a:schemeClr val="tx1"/>
-          </a:fontRef>
-        </p:style>
-      </p:cxnSp>
-      <p:sp>
-        <p:nvSpPr>
-          <p:cNvPr id="255" name="Заголовок 9">
-            <a:extLst>
-              <a:ext uri="{FF2B5EF4-FFF2-40B4-BE49-F238E27FC236}">
-                <a16:creationId xmlns:a16="http://schemas.microsoft.com/office/drawing/2014/main" id="{7CF5B536-9F85-4D22-AEA3-000B8BED0864}"/>
-              </a:ext>
-            </a:extLst>
-          </p:cNvPr>
-          <p:cNvSpPr txBox="1">
-            <a:spLocks/>
-          </p:cNvSpPr>
-          <p:nvPr/>
-        </p:nvSpPr>
-        <p:spPr>
-          <a:xfrm>
-            <a:off x="5682094" y="2029254"/>
-            <a:ext cx="610985" cy="414806"/>
-          </a:xfrm>
-          <a:prstGeom prst="rect">
-            <a:avLst/>
-          </a:prstGeom>
-          <a:ln w="12700" cap="flat" cmpd="sng" algn="ctr">
-            <a:solidFill>
-              <a:schemeClr val="accent1">
-                <a:lumMod val="75000"/>
-              </a:schemeClr>
-            </a:solidFill>
-            <a:prstDash val="solid"/>
-            <a:miter lim="800000"/>
-          </a:ln>
-        </p:spPr>
-        <p:style>
-          <a:lnRef idx="2">
-            <a:schemeClr val="accent1">
-              <a:shade val="50000"/>
-            </a:schemeClr>
-          </a:lnRef>
-          <a:fillRef idx="1">
-            <a:schemeClr val="accent1"/>
-          </a:fillRef>
-          <a:effectRef idx="0">
-            <a:schemeClr val="accent1"/>
-          </a:effectRef>
-          <a:fontRef idx="minor">
-            <a:schemeClr val="lt1"/>
-          </a:fontRef>
-        </p:style>
-        <p:txBody>
-          <a:bodyPr vert="horz" lIns="91440" tIns="45720" rIns="91440" bIns="45720" rtlCol="0" anchor="ctr">
-            <a:normAutofit fontScale="85000" lnSpcReduction="10000"/>
-          </a:bodyPr>
-          <a:lstStyle>
-            <a:lvl1pPr algn="ctr" defTabSz="914400" rtl="0" eaLnBrk="1" latinLnBrk="0" hangingPunct="1">
-              <a:lnSpc>
-                <a:spcPct val="90000"/>
-              </a:lnSpc>
-              <a:spcBef>
-                <a:spcPct val="0"/>
-              </a:spcBef>
-              <a:buNone/>
-              <a:defRPr sz="6000" kern="1200">
-                <a:solidFill>
-                  <a:schemeClr val="lt1"/>
-                </a:solidFill>
-                <a:latin typeface="+mn-lt"/>
-                <a:ea typeface="+mn-ea"/>
-                <a:cs typeface="+mn-cs"/>
-              </a:defRPr>
-            </a:lvl1pPr>
-            <a:lvl2pPr>
-              <a:defRPr>
-                <a:solidFill>
-                  <a:schemeClr val="lt1"/>
-                </a:solidFill>
-                <a:latin typeface="+mn-lt"/>
-                <a:ea typeface="+mn-ea"/>
-                <a:cs typeface="+mn-cs"/>
-              </a:defRPr>
-            </a:lvl2pPr>
-            <a:lvl3pPr>
-              <a:defRPr>
-                <a:solidFill>
-                  <a:schemeClr val="lt1"/>
-                </a:solidFill>
-                <a:latin typeface="+mn-lt"/>
-                <a:ea typeface="+mn-ea"/>
-                <a:cs typeface="+mn-cs"/>
-              </a:defRPr>
-            </a:lvl3pPr>
-            <a:lvl4pPr>
-              <a:defRPr>
-                <a:solidFill>
-                  <a:schemeClr val="lt1"/>
-                </a:solidFill>
-                <a:latin typeface="+mn-lt"/>
-                <a:ea typeface="+mn-ea"/>
-                <a:cs typeface="+mn-cs"/>
-              </a:defRPr>
-            </a:lvl4pPr>
-            <a:lvl5pPr>
-              <a:defRPr>
-                <a:solidFill>
-                  <a:schemeClr val="lt1"/>
-                </a:solidFill>
-                <a:latin typeface="+mn-lt"/>
-                <a:ea typeface="+mn-ea"/>
-                <a:cs typeface="+mn-cs"/>
-              </a:defRPr>
-            </a:lvl5pPr>
-            <a:lvl6pPr>
-              <a:defRPr>
-                <a:solidFill>
-                  <a:schemeClr val="lt1"/>
-                </a:solidFill>
-                <a:latin typeface="+mn-lt"/>
-                <a:ea typeface="+mn-ea"/>
-                <a:cs typeface="+mn-cs"/>
-              </a:defRPr>
-            </a:lvl6pPr>
-            <a:lvl7pPr>
-              <a:defRPr>
-                <a:solidFill>
-                  <a:schemeClr val="lt1"/>
-                </a:solidFill>
-                <a:latin typeface="+mn-lt"/>
-                <a:ea typeface="+mn-ea"/>
-                <a:cs typeface="+mn-cs"/>
-              </a:defRPr>
-            </a:lvl7pPr>
-            <a:lvl8pPr>
-              <a:defRPr>
-                <a:solidFill>
-                  <a:schemeClr val="lt1"/>
-                </a:solidFill>
-                <a:latin typeface="+mn-lt"/>
-                <a:ea typeface="+mn-ea"/>
-                <a:cs typeface="+mn-cs"/>
-              </a:defRPr>
-            </a:lvl8pPr>
-            <a:lvl9pPr>
-              <a:defRPr>
-                <a:solidFill>
-                  <a:schemeClr val="lt1"/>
-                </a:solidFill>
-                <a:latin typeface="+mn-lt"/>
-                <a:ea typeface="+mn-ea"/>
-                <a:cs typeface="+mn-cs"/>
-              </a:defRPr>
-            </a:lvl9pPr>
-          </a:lstStyle>
-          <a:p>
-            <a:r>
-              <a:rPr lang="ru-RU" sz="400" dirty="0"/>
-              <a:t>Воспользоваться Гражданской войной в Испании (Будут открыты решения по пограничным конфликтам с присоединением территории </a:t>
-            </a:r>
-            <a:r>
-              <a:rPr lang="ru-RU" sz="400" dirty="0" err="1"/>
-              <a:t>Испанск</a:t>
-            </a:r>
-            <a:r>
-              <a:rPr lang="ru-RU" sz="400" dirty="0"/>
-              <a:t>. Марокко)</a:t>
             </a:r>
             <a:endParaRPr lang="de-CH" sz="400" dirty="0"/>
           </a:p>
